--- a/public/fun/pack/pptx/talkpro/발표템플릿프리미엄_49_모임·동호회소개_스노우포레스트.pptx
+++ b/public/fun/pack/pptx/talkpro/발표템플릿프리미엄_49_모임·동호회소개_스노우포레스트.pptx
@@ -115,12 +115,12 @@
   <p:extLst>
     <p:ext uri="{521415D9-36F7-43E2-AB2F-B90AF26B5E84}">
       <p14:sectionLst xmlns:p14="http://schemas.microsoft.com/office/powerpoint/2010/main">
-        <p14:section name="시작" id="{626CF1C4-712F-4BFA-A5ED-CA8B3C493F3E}">
+        <p14:section name="시작" id="{5E9F1993-6F36-4017-86B9-75701D7655B6}">
           <p14:sldIdLst>
             <p14:sldId id="256"/>
           </p14:sldIdLst>
         </p14:section>
-        <p14:section name="본문" id="{7DE4B269-9C0C-42F2-B574-5F372E154CF3}">
+        <p14:section name="본문" id="{508CDE7E-214E-4005-BAB0-0CAA8AF4BB09}">
           <p14:sldIdLst>
             <p14:sldId id="257"/>
             <p14:sldId id="258"/>
@@ -131,7 +131,7 @@
             <p14:sldId id="263"/>
           </p14:sldIdLst>
         </p14:section>
-        <p14:section name="마무리" id="{4468DA91-9B7A-41D0-85F7-8BA624C925E3}">
+        <p14:section name="마무리" id="{566F8ED5-B402-46F7-BF38-6206B2CCF05F}">
           <p14:sldIdLst>
             <p14:sldId id="264"/>
           </p14:sldIdLst>
@@ -1931,7 +1931,7 @@
             </a:lvl1pPr>
           </a:lstStyle>
           <a:p>
-            <a:fld id="{8EB9450A-B762-430D-8ACA-E6180EA36587}" type="slidenum">
+            <a:fld id="{7864A8C2-1502-4568-BC51-BAC59D83C7C0}" type="slidenum">
               <a:rPr lang="en-US"/>
               <a:t>‹#›</a:t>
             </a:fld>
@@ -2587,7 +2587,7 @@
             </a:lvl1pPr>
           </a:lstStyle>
           <a:p>
-            <a:fld id="{AD1F4D16-82E9-47F3-9247-3C575B44861C}" type="slidenum">
+            <a:fld id="{6692345E-3A32-4A1E-A6DA-BADB8B1180BB}" type="slidenum">
               <a:rPr lang="en-US"/>
               <a:t>‹#›</a:t>
             </a:fld>
@@ -3224,7 +3224,7 @@
             </a:lvl1pPr>
           </a:lstStyle>
           <a:p>
-            <a:fld id="{2F92BA41-FBCB-4489-9C8C-23F1E5483EE0}" type="slidenum">
+            <a:fld id="{3285D6BE-1E15-4212-B6C2-9BEA9FAE10C7}" type="slidenum">
               <a:rPr lang="en-US"/>
               <a:t>‹#›</a:t>
             </a:fld>
@@ -4085,7 +4085,7 @@
           <a:p>
             <a:r>
               <a:rPr lang="ko-KR"/>
-              <a:t>새해 첫 모임에 오신 분들 환영합니다</a:t>
+              <a:t>첫 모임에 오신 분들 환영합니다</a:t>
             </a:r>
           </a:p>
         </p:txBody>
@@ -4113,7 +4113,7 @@
           <a:p>
             <a:r>
               <a:rPr lang="ko-KR"/>
-              <a:t>0000. 00. 00</a:t>
+              <a:t>날짜 입력</a:t>
             </a:r>
           </a:p>
         </p:txBody>
@@ -4198,7 +4198,7 @@
           <a:bodyPr/>
           <a:lstStyle/>
           <a:p>
-            <a:fld id="{4EE39BE9-1134-4326-8387-C6CB6107C219}" type="slidenum">
+            <a:fld id="{031A5659-A10F-4E00-9A9F-555E4A79EE03}" type="slidenum">
               <a:rPr lang="en-US"/>
               <a:t>‹#›</a:t>
             </a:fld>
@@ -5312,7 +5312,7 @@
           <a:bodyPr/>
           <a:lstStyle/>
           <a:p>
-            <a:fld id="{6D87FAA7-829A-4FBF-8C5A-E7DD302C884B}" type="slidenum">
+            <a:fld id="{73364F88-6A10-428E-836F-28F9894228C1}" type="slidenum">
               <a:rPr lang="en-US"/>
               <a:t>‹#›</a:t>
             </a:fld>
@@ -5400,7 +5400,7 @@
           <a:bodyPr/>
           <a:lstStyle/>
           <a:p>
-            <a:fld id="{DB9E61CB-2877-49B1-B1B5-33F2F813C9C3}" type="slidenum">
+            <a:fld id="{42E71CFC-F503-4102-AAEC-AF33C059CD31}" type="slidenum">
               <a:rPr lang="en-US"/>
               <a:t>‹#›</a:t>
             </a:fld>
@@ -6307,7 +6307,7 @@
           <a:bodyPr/>
           <a:lstStyle/>
           <a:p>
-            <a:fld id="{7AA9BC2F-191D-4F35-A834-40A164B0F64D}" type="slidenum">
+            <a:fld id="{B4DC4F0A-1A5A-4297-9828-C8A26A9A4F75}" type="slidenum">
               <a:rPr lang="en-US"/>
               <a:t>‹#›</a:t>
             </a:fld>
@@ -6911,7 +6911,7 @@
           <a:bodyPr/>
           <a:lstStyle/>
           <a:p>
-            <a:fld id="{12D520D2-209A-4C22-8430-1C8B6564B47D}" type="slidenum">
+            <a:fld id="{804D3CFA-857E-4AF0-9A66-491245278C75}" type="slidenum">
               <a:rPr lang="en-US"/>
               <a:t>‹#›</a:t>
             </a:fld>
@@ -7094,7 +7094,7 @@
           <a:bodyPr/>
           <a:lstStyle/>
           <a:p>
-            <a:fld id="{84640702-5E69-41DE-889C-DAB3E3B6A911}" type="slidenum">
+            <a:fld id="{9504BD85-D8B1-4A42-9A72-495AAE7DDECA}" type="slidenum">
               <a:rPr lang="en-US"/>
               <a:t>‹#›</a:t>
             </a:fld>
@@ -8158,7 +8158,7 @@
           <a:bodyPr/>
           <a:lstStyle/>
           <a:p>
-            <a:fld id="{F3331163-329E-4632-A46D-5F6B392C025B}" type="slidenum">
+            <a:fld id="{E822F930-DFF3-455E-ADB5-5F50B32C48B7}" type="slidenum">
               <a:rPr lang="en-US"/>
               <a:t>‹#›</a:t>
             </a:fld>
